--- a/videos/machine-learning/03_ridger_regression_gradient_descent/recreated_pptx/slide_015_recreated.pptx
+++ b/videos/machine-learning/03_ridger_regression_gradient_descent/recreated_pptx/slide_015_recreated.pptx
@@ -1165,7 +1165,7 @@
       </p:sp>
       <p:pic>
         <p:nvPicPr>
-          <p:cNvPr id="10" name="Image 0" descr="/workspaces/codespaces-blank/ai_llm_slides/videos/machine-learning/03_ridger_regression_gradient_descent/recreated_pptx/build/assets/eq_015_eq1_l1.png">    </p:cNvPr>
+          <p:cNvPr id="10" name="Image 0" descr="/home/ahmed/Projects/ai_llm_slides/videos/machine-learning/03_ridger_regression_gradient_descent/recreated_pptx/build/assets/eq_015_eq1_l1.png">    </p:cNvPr>
           <p:cNvPicPr>
             <a:picLocks noChangeAspect="1"/>
           </p:cNvPicPr>
@@ -1189,7 +1189,7 @@
       </p:pic>
       <p:pic>
         <p:nvPicPr>
-          <p:cNvPr id="11" name="Image 1" descr="/workspaces/codespaces-blank/ai_llm_slides/videos/machine-learning/03_ridger_regression_gradient_descent/recreated_pptx/build/assets/eq_015_eq1_l2.png">    </p:cNvPr>
+          <p:cNvPr id="11" name="Image 1" descr="/home/ahmed/Projects/ai_llm_slides/videos/machine-learning/03_ridger_regression_gradient_descent/recreated_pptx/build/assets/eq_015_eq1_l2.png">    </p:cNvPr>
           <p:cNvPicPr>
             <a:picLocks noChangeAspect="1"/>
           </p:cNvPicPr>
@@ -1213,7 +1213,7 @@
       </p:pic>
       <p:pic>
         <p:nvPicPr>
-          <p:cNvPr id="12" name="Image 2" descr="/workspaces/codespaces-blank/ai_llm_slides/videos/machine-learning/03_ridger_regression_gradient_descent/recreated_pptx/build/assets/eq_015_eq1_l3.png">    </p:cNvPr>
+          <p:cNvPr id="12" name="Image 2" descr="/home/ahmed/Projects/ai_llm_slides/videos/machine-learning/03_ridger_regression_gradient_descent/recreated_pptx/build/assets/eq_015_eq1_l3.png">    </p:cNvPr>
           <p:cNvPicPr>
             <a:picLocks noChangeAspect="1"/>
           </p:cNvPicPr>
@@ -1262,7 +1262,7 @@
       </p:sp>
       <p:pic>
         <p:nvPicPr>
-          <p:cNvPr id="14" name="Image 3" descr="/workspaces/codespaces-blank/ai_llm_slides/videos/machine-learning/03_ridger_regression_gradient_descent/recreated_pptx/build/assets/eq_015_redbox_eq.png">    </p:cNvPr>
+          <p:cNvPr id="14" name="Image 3" descr="/home/ahmed/Projects/ai_llm_slides/videos/machine-learning/03_ridger_regression_gradient_descent/recreated_pptx/build/assets/eq_015_redbox_eq.png">    </p:cNvPr>
           <p:cNvPicPr>
             <a:picLocks noChangeAspect="1"/>
           </p:cNvPicPr>
@@ -1320,7 +1320,41 @@
                 <a:ea typeface="DejaVu Sans" pitchFamily="34" charset="-122"/>
                 <a:cs typeface="DejaVu Sans" pitchFamily="34" charset="-120"/>
               </a:rPr>
-              <a:t>Get Best W that minimizes the Objective Function </a:t>
+              <a:t>Get Best </a:t>
+            </a:r>
+            <a:pPr algn="l" indent="0" marL="0">
+              <a:lnSpc>
+                <a:spcPts val="1800"/>
+              </a:lnSpc>
+              <a:buNone/>
+            </a:pPr>
+            <a:r>
+              <a:rPr lang="en-US" sz="1800" dirty="0">
+                <a:solidFill>
+                  <a:srgbClr val="C00000"/>
+                </a:solidFill>
+                <a:latin typeface="DejaVu Sans" pitchFamily="34" charset="0"/>
+                <a:ea typeface="DejaVu Sans" pitchFamily="34" charset="-122"/>
+                <a:cs typeface="DejaVu Sans" pitchFamily="34" charset="-120"/>
+              </a:rPr>
+              <a:t>W</a:t>
+            </a:r>
+            <a:pPr algn="l" indent="0" marL="0">
+              <a:lnSpc>
+                <a:spcPts val="1800"/>
+              </a:lnSpc>
+              <a:buNone/>
+            </a:pPr>
+            <a:r>
+              <a:rPr lang="en-US" sz="1800" dirty="0">
+                <a:solidFill>
+                  <a:srgbClr val="000000"/>
+                </a:solidFill>
+                <a:latin typeface="DejaVu Sans" pitchFamily="34" charset="0"/>
+                <a:ea typeface="DejaVu Sans" pitchFamily="34" charset="-122"/>
+                <a:cs typeface="DejaVu Sans" pitchFamily="34" charset="-120"/>
+              </a:rPr>
+              <a:t> that minimizes the Objective Function </a:t>
             </a:r>
             <a:pPr algn="l" indent="0" marL="0">
               <a:lnSpc>
@@ -1441,7 +1475,7 @@
       </p:sp>
       <p:pic>
         <p:nvPicPr>
-          <p:cNvPr id="18" name="Image 4" descr="/workspaces/codespaces-blank/ai_llm_slides/videos/machine-learning/03_ridger_regression_gradient_descent/recreated_pptx/build/assets/eq_015_peach_eq.png">    </p:cNvPr>
+          <p:cNvPr id="18" name="Image 4" descr="/home/ahmed/Projects/ai_llm_slides/videos/machine-learning/03_ridger_regression_gradient_descent/recreated_pptx/build/assets/eq_015_peach_eq.png">    </p:cNvPr>
           <p:cNvPicPr>
             <a:picLocks noChangeAspect="1"/>
           </p:cNvPicPr>
@@ -1490,7 +1524,7 @@
       </p:sp>
       <p:pic>
         <p:nvPicPr>
-          <p:cNvPr id="20" name="Image 5" descr="/workspaces/codespaces-blank/ai_llm_slides/videos/machine-learning/03_ridger_regression_gradient_descent/recreated_pptx/build/assets/eq_015_deriv_l1.png">    </p:cNvPr>
+          <p:cNvPr id="20" name="Image 5" descr="/home/ahmed/Projects/ai_llm_slides/videos/machine-learning/03_ridger_regression_gradient_descent/recreated_pptx/build/assets/eq_015_deriv_l1.png">    </p:cNvPr>
           <p:cNvPicPr>
             <a:picLocks noChangeAspect="1"/>
           </p:cNvPicPr>
@@ -1514,7 +1548,7 @@
       </p:pic>
       <p:pic>
         <p:nvPicPr>
-          <p:cNvPr id="21" name="Image 6" descr="/workspaces/codespaces-blank/ai_llm_slides/videos/machine-learning/03_ridger_regression_gradient_descent/recreated_pptx/build/assets/eq_015_deriv_l2.png">    </p:cNvPr>
+          <p:cNvPr id="21" name="Image 6" descr="/home/ahmed/Projects/ai_llm_slides/videos/machine-learning/03_ridger_regression_gradient_descent/recreated_pptx/build/assets/eq_015_deriv_l2.png">    </p:cNvPr>
           <p:cNvPicPr>
             <a:picLocks noChangeAspect="1"/>
           </p:cNvPicPr>
@@ -1538,7 +1572,7 @@
       </p:pic>
       <p:pic>
         <p:nvPicPr>
-          <p:cNvPr id="22" name="Image 7" descr="/workspaces/codespaces-blank/ai_llm_slides/videos/machine-learning/03_ridger_regression_gradient_descent/recreated_pptx/build/assets/eq_015_normal.png">    </p:cNvPr>
+          <p:cNvPr id="22" name="Image 7" descr="/home/ahmed/Projects/ai_llm_slides/videos/machine-learning/03_ridger_regression_gradient_descent/recreated_pptx/build/assets/eq_015_normal.png">    </p:cNvPr>
           <p:cNvPicPr>
             <a:picLocks noChangeAspect="1"/>
           </p:cNvPicPr>
@@ -1587,7 +1621,7 @@
       </p:sp>
       <p:pic>
         <p:nvPicPr>
-          <p:cNvPr id="24" name="Image 8" descr="/workspaces/codespaces-blank/ai_llm_slides/videos/machine-learning/03_ridger_regression_gradient_descent/recreated_pptx/build/assets/eq_015_solution.png">    </p:cNvPr>
+          <p:cNvPr id="24" name="Image 8" descr="/home/ahmed/Projects/ai_llm_slides/videos/machine-learning/03_ridger_regression_gradient_descent/recreated_pptx/build/assets/eq_015_solution.png">    </p:cNvPr>
           <p:cNvPicPr>
             <a:picLocks noChangeAspect="1"/>
           </p:cNvPicPr>
